--- a/dist/초4/과학/땅과밤하늘/초4_과학_땅과밤하늘_03_태양계_학생용.pptx
+++ b/dist/초4/과학/땅과밤하늘/초4_과학_땅과밤하늘_03_태양계_학생용.pptx
@@ -124,13 +124,13 @@
   <p:extLst>
     <p:ext uri="{521415D9-36F7-43E2-AB2F-B90AF26B5E84}">
       <p14:sectionLst xmlns:p14="http://schemas.microsoft.com/office/powerpoint/2010/main">
-        <p14:section name="도입" id="{e8c6052b-66f3-9299-3598-ce815faa2799}">
+        <p14:section name="도입" id="{246f1968-f9e9-6c3d-ddb3-2937473a5b04}">
           <p14:sldIdLst>
             <p14:sldId id="256"/>
             <p14:sldId id="257"/>
           </p14:sldIdLst>
         </p14:section>
-        <p14:section name="개념" id="{bea8ff5f-f1f1-658b-2e17-d54368dc798a}">
+        <p14:section name="개념" id="{6b1eea76-2f60-90c9-d0bd-96da1e81a2cc}">
           <p14:sldIdLst>
             <p14:sldId id="258"/>
             <p14:sldId id="259"/>
@@ -138,7 +138,7 @@
             <p14:sldId id="268"/>
           </p14:sldIdLst>
         </p14:section>
-        <p14:section name="연습" id="{df7d7565-5b1c-495e-515b-250bffa4a1f3}">
+        <p14:section name="연습" id="{ab1129b4-d304-d14d-cde7-88f13041dc7e}">
           <p14:sldIdLst>
             <p14:sldId id="260"/>
             <p14:sldId id="261"/>
@@ -150,30 +150,30 @@
             <p14:sldId id="269"/>
           </p14:sldIdLst>
         </p14:section>
-        <p14:section name="개념" id="{6d08085d-dc17-a9c3-8432-6e254d9de86f}">
+        <p14:section name="개념" id="{991d9cc0-2a0b-90ae-9835-a68788263780}">
           <p14:sldIdLst/>
         </p14:section>
-        <p14:section name="연습" id="{afd6d029-fe31-c508-f402-24fc4fe4e5ba}">
+        <p14:section name="연습" id="{cf9f437f-6315-0273-15e6-85806da3a950}">
           <p14:sldIdLst/>
         </p14:section>
-        <p14:section name="개념" id="{fca5e07c-f1e2-ff7e-af93-732ee830919b}">
+        <p14:section name="개념" id="{117cdc94-454f-47ec-483b-f901b5148e5e}">
           <p14:sldIdLst/>
         </p14:section>
-        <p14:section name="연습" id="{cec83e72-7444-7a29-0c49-7c9875a25926}">
+        <p14:section name="연습" id="{11518ed4-9de6-c6fa-7260-ec8307540aff}">
           <p14:sldIdLst/>
         </p14:section>
-        <p14:section name="확인" id="{f45d0f0a-3be1-5053-79eb-26e99652f411}">
+        <p14:section name="확인" id="{b34b8db8-e40d-057a-7331-e04a4a744a7f}">
           <p14:sldIdLst>
             <p14:sldId id="270"/>
             <p14:sldId id="271"/>
           </p14:sldIdLst>
         </p14:section>
-        <p14:section name="정리" id="{ab8ea3c5-b6f7-d5db-421e-4f62a862c7d9}">
+        <p14:section name="정리" id="{5af93768-c020-c87b-81ec-a4dde654ec4b}">
           <p14:sldIdLst>
             <p14:sldId id="272"/>
           </p14:sldIdLst>
         </p14:section>
-        <p14:section name="보충" id="{090504c3-b526-5d76-7edb-350967207600}">
+        <p14:section name="보충" id="{8f8deaeb-ec4e-5eca-b466-01993ef35e76}">
           <p14:sldIdLst>
             <p14:sldId id="273"/>
           </p14:sldIdLst>
